--- a/NN-day2/NN_Day2.pptx
+++ b/NN-day2/NN_Day2.pptx
@@ -121,7 +121,7 @@
   <p:extLst>
     <p:ext uri="{521415D9-36F7-43E2-AB2F-B90AF26B5E84}">
       <p14:sectionLst xmlns:p14="http://schemas.microsoft.com/office/powerpoint/2010/main">
-        <p14:section name="도입" id="{7a268a92-c15e-6a8c-2d7d-c25fea7febca}">
+        <p14:section name="도입" id="{47bf2a7f-6bfb-9c6e-5650-0b96d3717088}">
           <p14:sldIdLst>
             <p14:sldId id="256"/>
             <p14:sldId id="257"/>
@@ -130,47 +130,47 @@
             <p14:sldId id="260"/>
           </p14:sldIdLst>
         </p14:section>
-        <p14:section name="1교시" id="{935c0e3b-a0c4-e169-28c7-738b92f7c25d}">
+        <p14:section name="1교시" id="{503cb4ac-5c53-5baa-ad40-51dd8924c6dc}">
           <p14:sldIdLst>
             <p14:sldId id="261"/>
           </p14:sldIdLst>
         </p14:section>
-        <p14:section name="2교시" id="{e8c9beda-a946-49f6-4c9e-ab539c2a8506}">
+        <p14:section name="2교시" id="{49be06c0-3825-b9e5-796c-94d9c9da440c}">
           <p14:sldIdLst>
             <p14:sldId id="262"/>
           </p14:sldIdLst>
         </p14:section>
-        <p14:section name="3교시" id="{317bda57-9305-0d35-3172-1c30b46d2f1d}">
+        <p14:section name="3교시" id="{ecdd3102-5233-dd82-25d0-a11b9098075c}">
           <p14:sldIdLst>
             <p14:sldId id="263"/>
           </p14:sldIdLst>
         </p14:section>
-        <p14:section name="4교시" id="{761c8c82-d3bf-7a75-d366-665d71fdfcec}">
+        <p14:section name="4교시" id="{8b04206c-4b63-ff41-c11e-cf9d976c76ea}">
           <p14:sldIdLst>
             <p14:sldId id="264"/>
           </p14:sldIdLst>
         </p14:section>
-        <p14:section name="5교시" id="{03a17a4b-0c81-3e35-a04f-f446614cb3cd}">
+        <p14:section name="5교시" id="{3d539cad-6488-d341-c7bc-4a52be9b7e36}">
           <p14:sldIdLst>
             <p14:sldId id="265"/>
           </p14:sldIdLst>
         </p14:section>
-        <p14:section name="6교시" id="{6f554f84-46cf-30b6-ce2b-46d6ffb1c3e0}">
+        <p14:section name="6교시" id="{e80be638-0cec-85ed-037c-98ba10bb36be}">
           <p14:sldIdLst>
             <p14:sldId id="266"/>
           </p14:sldIdLst>
         </p14:section>
-        <p14:section name="7교시" id="{93611cea-a89d-e0b1-830b-651c85768291}">
+        <p14:section name="7교시" id="{6626225f-432c-d0bd-f582-91d1dfd0d669}">
           <p14:sldIdLst>
             <p14:sldId id="267"/>
           </p14:sldIdLst>
         </p14:section>
-        <p14:section name="8교시" id="{fd16a542-c27c-1414-13c4-9d9e9d3ba866}">
+        <p14:section name="8교시" id="{c011f3e4-b99c-34b1-2714-7228ccf13ad0}">
           <p14:sldIdLst>
             <p14:sldId id="268"/>
           </p14:sldIdLst>
         </p14:section>
-        <p14:section name="정리" id="{db80d276-4040-0a36-e53c-162cf9f39d59}">
+        <p14:section name="정리" id="{709446b9-d410-15a3-f767-65d30a13607b}">
           <p14:sldIdLst>
             <p14:sldId id="269"/>
             <p14:sldId id="270"/>
@@ -6106,7 +6106,7 @@
                   <a:schemeClr val="tx1"/>
                 </a:solidFill>
               </a:rPr>
-              <a:t>데이터 50개: t = 2x + 1 + 잡음</a:t>
+              <a:t>데이터 50개: T = 2X + 1 + 잡음, shape (50, 1)</a:t>
             </a:r>
             <a:endParaRPr lang="en-US" sz="1300" dirty="0"/>
           </a:p>
@@ -6124,7 +6124,7 @@
                   <a:schemeClr val="tx1"/>
                 </a:solidFill>
               </a:rPr>
-              <a:t>MSE 기울기를 손으로 유도</a:t>
+              <a:t>½ 을 붙인 MSE → 기울기 (y − t)x</a:t>
             </a:r>
             <a:endParaRPr lang="en-US" sz="1300" dirty="0"/>
           </a:p>
@@ -6628,7 +6628,7 @@
         <p:spPr>
           <a:xfrm>
             <a:off x="5047488" y="1645920"/>
-            <a:ext cx="1371600" cy="1094232"/>
+            <a:ext cx="1371600" cy="793242"/>
           </a:xfrm>
           <a:prstGeom prst="rect">
             <a:avLst/>
@@ -6649,7 +6649,7 @@
                   <a:schemeClr val="tx1"/>
                 </a:solidFill>
               </a:rPr>
-              <a:t>기울기</a:t>
+              <a:t>모델 · 손실</a:t>
             </a:r>
             <a:endParaRPr lang="en-US" sz="1250" dirty="0"/>
           </a:p>
@@ -6664,11 +6664,11 @@
         <p:spPr>
           <a:xfrm>
             <a:off x="6446520" y="1645920"/>
-            <a:ext cx="5120640" cy="1094232"/>
+            <a:ext cx="5120640" cy="793242"/>
           </a:xfrm>
           <a:prstGeom prst="roundRect">
             <a:avLst>
-              <a:gd name="adj" fmla="val 4178"/>
+              <a:gd name="adj" fmla="val 5764"/>
             </a:avLst>
           </a:prstGeom>
           <a:solidFill>
@@ -6691,7 +6691,7 @@
         <p:spPr>
           <a:xfrm>
             <a:off x="6556248" y="1700784"/>
-            <a:ext cx="4901184" cy="984504"/>
+            <a:ext cx="4901184" cy="683514"/>
           </a:xfrm>
           <a:prstGeom prst="rect">
             <a:avLst/>
@@ -6715,7 +6715,7 @@
                 <a:ea typeface="Courier New" pitchFamily="34" charset="-122"/>
                 <a:cs typeface="Courier New" pitchFamily="34" charset="-120"/>
               </a:rPr>
-              <a:t>dw = 2 * np.mean((y - t) * x)</a:t>
+              <a:t>Y = X @ W + b</a:t>
             </a:r>
             <a:endParaRPr lang="en-US" sz="1300" dirty="0"/>
           </a:p>
@@ -6732,7 +6732,7 @@
                 <a:ea typeface="Courier New" pitchFamily="34" charset="-122"/>
                 <a:cs typeface="Courier New" pitchFamily="34" charset="-120"/>
               </a:rPr>
-              <a:t>db = 2 * np.mean(y - t)</a:t>
+              <a:t>L = ½ mean((Y−T)²)</a:t>
             </a:r>
             <a:endParaRPr lang="en-US" sz="1300" dirty="0"/>
           </a:p>
@@ -6746,8 +6746,8 @@
         </p:nvSpPr>
         <p:spPr>
           <a:xfrm>
-            <a:off x="5047488" y="2849880"/>
-            <a:ext cx="1371600" cy="1094232"/>
+            <a:off x="5047488" y="2548890"/>
+            <a:ext cx="1371600" cy="793242"/>
           </a:xfrm>
           <a:prstGeom prst="rect">
             <a:avLst/>
@@ -6768,7 +6768,7 @@
                   <a:schemeClr val="tx1"/>
                 </a:solidFill>
               </a:rPr>
-              <a:t>학습</a:t>
+              <a:t>기울기</a:t>
             </a:r>
             <a:endParaRPr lang="en-US" sz="1250" dirty="0"/>
           </a:p>
@@ -6782,12 +6782,12 @@
         </p:nvSpPr>
         <p:spPr>
           <a:xfrm>
-            <a:off x="6446520" y="2849880"/>
-            <a:ext cx="5120640" cy="1094232"/>
+            <a:off x="6446520" y="2548890"/>
+            <a:ext cx="5120640" cy="793242"/>
           </a:xfrm>
           <a:prstGeom prst="roundRect">
             <a:avLst>
-              <a:gd name="adj" fmla="val 4178"/>
+              <a:gd name="adj" fmla="val 5764"/>
             </a:avLst>
           </a:prstGeom>
           <a:solidFill>
@@ -6809,8 +6809,8 @@
         </p:nvSpPr>
         <p:spPr>
           <a:xfrm>
-            <a:off x="6556248" y="2904744"/>
-            <a:ext cx="4901184" cy="984504"/>
+            <a:off x="6556248" y="2603754"/>
+            <a:ext cx="4901184" cy="683514"/>
           </a:xfrm>
           <a:prstGeom prst="rect">
             <a:avLst/>
@@ -6834,7 +6834,7 @@
                 <a:ea typeface="Courier New" pitchFamily="34" charset="-122"/>
                 <a:cs typeface="Courier New" pitchFamily="34" charset="-120"/>
               </a:rPr>
-              <a:t>w = w - lr * dw;  b = b - lr * db</a:t>
+              <a:t>dW = X.T @ (Y - T) / N</a:t>
             </a:r>
             <a:endParaRPr lang="en-US" sz="1300" dirty="0"/>
           </a:p>
@@ -6851,7 +6851,7 @@
                 <a:ea typeface="Courier New" pitchFamily="34" charset="-122"/>
                 <a:cs typeface="Courier New" pitchFamily="34" charset="-120"/>
               </a:rPr>
-              <a:t>lr 0.5 · 200 epoch → w 2.05, b 0.98</a:t>
+              <a:t>db = np.mean(Y - T, axis=0)</a:t>
             </a:r>
             <a:endParaRPr lang="en-US" sz="1300" dirty="0"/>
           </a:p>
@@ -6865,8 +6865,8 @@
         </p:nvSpPr>
         <p:spPr>
           <a:xfrm>
-            <a:off x="5047488" y="4053840"/>
-            <a:ext cx="1371600" cy="1094232"/>
+            <a:off x="5047488" y="3451860"/>
+            <a:ext cx="1371600" cy="793242"/>
           </a:xfrm>
           <a:prstGeom prst="rect">
             <a:avLst/>
@@ -6887,7 +6887,7 @@
                   <a:schemeClr val="tx1"/>
                 </a:solidFill>
               </a:rPr>
-              <a:t>학습률</a:t>
+              <a:t>학습</a:t>
             </a:r>
             <a:endParaRPr lang="en-US" sz="1250" dirty="0"/>
           </a:p>
@@ -6901,12 +6901,12 @@
         </p:nvSpPr>
         <p:spPr>
           <a:xfrm>
-            <a:off x="6446520" y="4053840"/>
-            <a:ext cx="5120640" cy="1094232"/>
+            <a:off x="6446520" y="3451860"/>
+            <a:ext cx="5120640" cy="793242"/>
           </a:xfrm>
           <a:prstGeom prst="roundRect">
             <a:avLst>
-              <a:gd name="adj" fmla="val 4178"/>
+              <a:gd name="adj" fmla="val 5764"/>
             </a:avLst>
           </a:prstGeom>
           <a:solidFill>
@@ -6928,8 +6928,8 @@
         </p:nvSpPr>
         <p:spPr>
           <a:xfrm>
-            <a:off x="6556248" y="4108704"/>
-            <a:ext cx="4901184" cy="984504"/>
+            <a:off x="6556248" y="3506724"/>
+            <a:ext cx="4901184" cy="683514"/>
           </a:xfrm>
           <a:prstGeom prst="rect">
             <a:avLst/>
@@ -6953,7 +6953,7 @@
                 <a:ea typeface="Courier New" pitchFamily="34" charset="-122"/>
                 <a:cs typeface="Courier New" pitchFamily="34" charset="-120"/>
               </a:rPr>
-              <a:t>0.1: 아직 덜 감 · 0.5: 수렴</a:t>
+              <a:t>W -= lr * dW;  b -= lr * db</a:t>
             </a:r>
             <a:endParaRPr lang="en-US" sz="1300" dirty="0"/>
           </a:p>
@@ -6970,7 +6970,7 @@
                 <a:ea typeface="Courier New" pitchFamily="34" charset="-122"/>
                 <a:cs typeface="Courier New" pitchFamily="34" charset="-120"/>
               </a:rPr>
-              <a:t>1.0: 발산 (상한 ≈ 0.77)</a:t>
+              <a:t>lr 1.0 · 200 epoch → W 2.05, b 0.98</a:t>
             </a:r>
             <a:endParaRPr lang="en-US" sz="1300" dirty="0"/>
           </a:p>
@@ -6979,6 +6979,108 @@
       <p:sp>
         <p:nvSpPr>
           <p:cNvPr id="32" name="text_318"/>
+          <p:cNvSpPr txBox="1"/>
+          <p:nvPr/>
+        </p:nvSpPr>
+        <p:spPr>
+          <a:xfrm>
+            <a:off x="5047488" y="4354830"/>
+            <a:ext cx="1371600" cy="793242"/>
+          </a:xfrm>
+          <a:prstGeom prst="rect">
+            <a:avLst/>
+          </a:prstGeom>
+          <a:noFill/>
+          <a:ln/>
+        </p:spPr>
+        <p:txBody>
+          <a:bodyPr wrap="square" lIns="0" tIns="0" rIns="0" bIns="0" rtlCol="0" anchor="ctr"/>
+          <a:lstStyle/>
+          <a:p>
+            <a:pPr indent="0" marL="0">
+              <a:buNone/>
+            </a:pPr>
+            <a:r>
+              <a:rPr lang="en-US" sz="1250" b="1" dirty="0">
+                <a:solidFill>
+                  <a:schemeClr val="tx1"/>
+                </a:solidFill>
+              </a:rPr>
+              <a:t>학습률</a:t>
+            </a:r>
+            <a:endParaRPr lang="en-US" sz="1250" dirty="0"/>
+          </a:p>
+        </p:txBody>
+      </p:sp>
+      <p:sp>
+        <p:nvSpPr>
+          <p:cNvPr id="33" name="codebg_319"/>
+          <p:cNvSpPr/>
+          <p:nvPr/>
+        </p:nvSpPr>
+        <p:spPr>
+          <a:xfrm>
+            <a:off x="6446520" y="4354830"/>
+            <a:ext cx="5120640" cy="793242"/>
+          </a:xfrm>
+          <a:prstGeom prst="roundRect">
+            <a:avLst>
+              <a:gd name="adj" fmla="val 5764"/>
+            </a:avLst>
+          </a:prstGeom>
+          <a:solidFill>
+            <a:srgbClr val="0A0F1C"/>
+          </a:solidFill>
+          <a:ln w="12700">
+            <a:solidFill>
+              <a:srgbClr val="1F2B45"/>
+            </a:solidFill>
+            <a:prstDash val="solid"/>
+          </a:ln>
+        </p:spPr>
+      </p:sp>
+      <p:sp>
+        <p:nvSpPr>
+          <p:cNvPr id="34" name="code_320"/>
+          <p:cNvSpPr txBox="1"/>
+          <p:nvPr/>
+        </p:nvSpPr>
+        <p:spPr>
+          <a:xfrm>
+            <a:off x="6556248" y="4409694"/>
+            <a:ext cx="4901184" cy="683514"/>
+          </a:xfrm>
+          <a:prstGeom prst="rect">
+            <a:avLst/>
+          </a:prstGeom>
+          <a:noFill/>
+          <a:ln/>
+        </p:spPr>
+        <p:txBody>
+          <a:bodyPr wrap="square" lIns="0" tIns="0" rIns="0" bIns="0" rtlCol="0" anchor="ctr"/>
+          <a:lstStyle/>
+          <a:p>
+            <a:pPr indent="0" marL="0">
+              <a:buNone/>
+            </a:pPr>
+            <a:r>
+              <a:rPr lang="en-US" sz="1300" dirty="0">
+                <a:solidFill>
+                  <a:schemeClr val="accent3"/>
+                </a:solidFill>
+                <a:latin typeface="Courier New" pitchFamily="34" charset="0"/>
+                <a:ea typeface="Courier New" pitchFamily="34" charset="-122"/>
+                <a:cs typeface="Courier New" pitchFamily="34" charset="-120"/>
+              </a:rPr>
+              <a:t>lr 0.2 덜 감 / 2.0 발산 (상한 ≈ 1.54)</a:t>
+            </a:r>
+            <a:endParaRPr lang="en-US" sz="1300" dirty="0"/>
+          </a:p>
+        </p:txBody>
+      </p:sp>
+      <p:sp>
+        <p:nvSpPr>
+          <p:cNvPr id="35" name="text_321"/>
           <p:cNvSpPr txBox="1"/>
           <p:nvPr/>
         </p:nvSpPr>
@@ -7014,7 +7116,7 @@
       </p:sp>
       <p:sp>
         <p:nvSpPr>
-          <p:cNvPr id="33" name="text_319"/>
+          <p:cNvPr id="36" name="text_322"/>
           <p:cNvSpPr txBox="1"/>
           <p:nvPr/>
         </p:nvSpPr>
@@ -7050,7 +7152,7 @@
       </p:sp>
       <p:sp>
         <p:nvSpPr>
-          <p:cNvPr id="34" name="Text 0"/>
+          <p:cNvPr id="37" name="Text 0"/>
           <p:cNvSpPr/>
           <p:nvPr>
             <p:ph idx="100" type="title" hasCustomPrompt="1"/>
@@ -7080,7 +7182,7 @@
       </p:sp>
       <p:sp>
         <p:nvSpPr>
-          <p:cNvPr id="35" name="Text 0"/>
+          <p:cNvPr id="38" name="Text 0"/>
           <p:cNvSpPr/>
           <p:nvPr>
             <p:ph idx="101" type="body" hasCustomPrompt="1"/>
@@ -7180,7 +7282,7 @@
       </p:grpSpPr>
       <p:sp>
         <p:nvSpPr>
-          <p:cNvPr id="2" name="badge_320"/>
+          <p:cNvPr id="2" name="badge_323"/>
           <p:cNvSpPr/>
           <p:nvPr/>
         </p:nvSpPr>
@@ -7205,7 +7307,7 @@
       </p:sp>
       <p:sp>
         <p:nvSpPr>
-          <p:cNvPr id="3" name="badgeNum_321"/>
+          <p:cNvPr id="3" name="badgeNum_324"/>
           <p:cNvSpPr txBox="1"/>
           <p:nvPr/>
         </p:nvSpPr>
@@ -7241,7 +7343,7 @@
       </p:sp>
       <p:sp>
         <p:nvSpPr>
-          <p:cNvPr id="4" name="text_322"/>
+          <p:cNvPr id="4" name="text_325"/>
           <p:cNvSpPr txBox="1"/>
           <p:nvPr/>
         </p:nvSpPr>
@@ -7277,7 +7379,7 @@
       </p:sp>
       <p:sp>
         <p:nvSpPr>
-          <p:cNvPr id="5" name="text_323"/>
+          <p:cNvPr id="5" name="text_326"/>
           <p:cNvSpPr txBox="1"/>
           <p:nvPr/>
         </p:nvSpPr>
@@ -7316,7 +7418,7 @@
       </p:sp>
       <p:sp>
         <p:nvSpPr>
-          <p:cNvPr id="6" name="panel_324"/>
+          <p:cNvPr id="6" name="panel_327"/>
           <p:cNvSpPr/>
           <p:nvPr/>
         </p:nvSpPr>
@@ -7343,7 +7445,7 @@
       </p:sp>
       <p:sp>
         <p:nvSpPr>
-          <p:cNvPr id="7" name="text_325"/>
+          <p:cNvPr id="7" name="text_328"/>
           <p:cNvSpPr txBox="1"/>
           <p:nvPr/>
         </p:nvSpPr>
@@ -7379,7 +7481,7 @@
       </p:sp>
       <p:sp>
         <p:nvSpPr>
-          <p:cNvPr id="8" name="codebg_326"/>
+          <p:cNvPr id="8" name="codebg_329"/>
           <p:cNvSpPr/>
           <p:nvPr/>
         </p:nvSpPr>
@@ -7406,7 +7508,7 @@
       </p:sp>
       <p:sp>
         <p:nvSpPr>
-          <p:cNvPr id="9" name="code_327"/>
+          <p:cNvPr id="9" name="code_330"/>
           <p:cNvSpPr txBox="1"/>
           <p:nvPr/>
         </p:nvSpPr>
@@ -7437,7 +7539,7 @@
                 <a:ea typeface="Courier New" pitchFamily="34" charset="-122"/>
                 <a:cs typeface="Courier New" pitchFamily="34" charset="-120"/>
               </a:rPr>
-              <a:t>p = sigmoid(X @ θ[:2] + θ[2])</a:t>
+              <a:t>P  = sigmoid(X @ W + b)</a:t>
             </a:r>
             <a:endParaRPr lang="en-US" sz="1200" dirty="0"/>
           </a:p>
@@ -7454,7 +7556,7 @@
                 <a:ea typeface="Courier New" pitchFamily="34" charset="-122"/>
                 <a:cs typeface="Courier New" pitchFamily="34" charset="-120"/>
               </a:rPr>
-              <a:t>BCE = −mean(t·log p + (1−t)·log(1−p))</a:t>
+              <a:t>dW = X.T @ (P − T)/N   # 같은 (y − t)x 모양</a:t>
             </a:r>
             <a:endParaRPr lang="en-US" sz="1200" dirty="0"/>
           </a:p>
@@ -8118,7 +8220,7 @@
                             <a:srgbClr val="DBE4F0"/>
                           </a:solidFill>
                         </a:rPr>
-                        <a:t>numerical_gradient 로 300 step 학습</a:t>
+                        <a:t>gradients + 300 step 학습 (lr 0.5)</a:t>
                       </a:r>
                       <a:endParaRPr lang="en-US" sz="1200" dirty="0"/>
                     </a:p>
@@ -8603,7 +8705,7 @@
       </p:graphicFrame>
       <p:sp>
         <p:nvSpPr>
-          <p:cNvPr id="11" name="text_328"/>
+          <p:cNvPr id="11" name="text_331"/>
           <p:cNvSpPr txBox="1"/>
           <p:nvPr/>
         </p:nvSpPr>
@@ -8639,7 +8741,7 @@
       </p:sp>
       <p:sp>
         <p:nvSpPr>
-          <p:cNvPr id="12" name="text_329"/>
+          <p:cNvPr id="12" name="text_332"/>
           <p:cNvSpPr txBox="1"/>
           <p:nvPr/>
         </p:nvSpPr>
@@ -8675,7 +8777,7 @@
       </p:sp>
       <p:sp>
         <p:nvSpPr>
-          <p:cNvPr id="13" name="panel_330"/>
+          <p:cNvPr id="13" name="panel_333"/>
           <p:cNvSpPr/>
           <p:nvPr/>
         </p:nvSpPr>
@@ -8702,7 +8804,7 @@
       </p:sp>
       <p:sp>
         <p:nvSpPr>
-          <p:cNvPr id="14" name="text_331"/>
+          <p:cNvPr id="14" name="text_334"/>
           <p:cNvSpPr txBox="1"/>
           <p:nvPr/>
         </p:nvSpPr>
@@ -8738,7 +8840,7 @@
       </p:sp>
       <p:sp>
         <p:nvSpPr>
-          <p:cNvPr id="15" name="partRow_332"/>
+          <p:cNvPr id="15" name="partRow_335"/>
           <p:cNvSpPr/>
           <p:nvPr/>
         </p:nvSpPr>
@@ -8765,7 +8867,7 @@
       </p:sp>
       <p:sp>
         <p:nvSpPr>
-          <p:cNvPr id="16" name="text_333"/>
+          <p:cNvPr id="16" name="text_336"/>
           <p:cNvSpPr txBox="1"/>
           <p:nvPr/>
         </p:nvSpPr>
@@ -8801,7 +8903,7 @@
       </p:sp>
       <p:sp>
         <p:nvSpPr>
-          <p:cNvPr id="17" name="text_334"/>
+          <p:cNvPr id="17" name="text_337"/>
           <p:cNvSpPr txBox="1"/>
           <p:nvPr/>
         </p:nvSpPr>
@@ -8832,7 +8934,7 @@
                 <a:ea typeface="Courier New" pitchFamily="34" charset="-122"/>
                 <a:cs typeface="Courier New" pitchFamily="34" charset="-120"/>
               </a:rPr>
-              <a:t>가중합 X @ θ[:2] + θ[2]</a:t>
+              <a:t>가설 X @ W + b</a:t>
             </a:r>
             <a:endParaRPr lang="en-US" sz="1150" dirty="0"/>
           </a:p>
@@ -8840,7 +8942,7 @@
       </p:sp>
       <p:sp>
         <p:nvSpPr>
-          <p:cNvPr id="18" name="text_335"/>
+          <p:cNvPr id="18" name="text_338"/>
           <p:cNvSpPr txBox="1"/>
           <p:nvPr/>
         </p:nvSpPr>
@@ -8876,7 +8978,7 @@
       </p:sp>
       <p:sp>
         <p:nvSpPr>
-          <p:cNvPr id="19" name="partRow_336"/>
+          <p:cNvPr id="19" name="partRow_339"/>
           <p:cNvSpPr/>
           <p:nvPr/>
         </p:nvSpPr>
@@ -8903,7 +9005,7 @@
       </p:sp>
       <p:sp>
         <p:nvSpPr>
-          <p:cNvPr id="20" name="text_337"/>
+          <p:cNvPr id="20" name="text_340"/>
           <p:cNvSpPr txBox="1"/>
           <p:nvPr/>
         </p:nvSpPr>
@@ -8939,7 +9041,7 @@
       </p:sp>
       <p:sp>
         <p:nvSpPr>
-          <p:cNvPr id="21" name="text_338"/>
+          <p:cNvPr id="21" name="text_341"/>
           <p:cNvSpPr txBox="1"/>
           <p:nvPr/>
         </p:nvSpPr>
@@ -8978,7 +9080,7 @@
       </p:sp>
       <p:sp>
         <p:nvSpPr>
-          <p:cNvPr id="22" name="text_339"/>
+          <p:cNvPr id="22" name="text_342"/>
           <p:cNvSpPr txBox="1"/>
           <p:nvPr/>
         </p:nvSpPr>
@@ -9014,7 +9116,7 @@
       </p:sp>
       <p:sp>
         <p:nvSpPr>
-          <p:cNvPr id="23" name="partRow_340"/>
+          <p:cNvPr id="23" name="partRow_343"/>
           <p:cNvSpPr/>
           <p:nvPr/>
         </p:nvSpPr>
@@ -9041,7 +9143,7 @@
       </p:sp>
       <p:sp>
         <p:nvSpPr>
-          <p:cNvPr id="24" name="text_341"/>
+          <p:cNvPr id="24" name="text_344"/>
           <p:cNvSpPr txBox="1"/>
           <p:nvPr/>
         </p:nvSpPr>
@@ -9077,7 +9179,7 @@
       </p:sp>
       <p:sp>
         <p:nvSpPr>
-          <p:cNvPr id="25" name="text_342"/>
+          <p:cNvPr id="25" name="text_345"/>
           <p:cNvSpPr txBox="1"/>
           <p:nvPr/>
         </p:nvSpPr>
@@ -9116,7 +9218,7 @@
       </p:sp>
       <p:sp>
         <p:nvSpPr>
-          <p:cNvPr id="26" name="text_343"/>
+          <p:cNvPr id="26" name="text_346"/>
           <p:cNvSpPr txBox="1"/>
           <p:nvPr/>
         </p:nvSpPr>
@@ -9152,7 +9254,7 @@
       </p:sp>
       <p:sp>
         <p:nvSpPr>
-          <p:cNvPr id="27" name="partRow_344"/>
+          <p:cNvPr id="27" name="partRow_347"/>
           <p:cNvSpPr/>
           <p:nvPr/>
         </p:nvSpPr>
@@ -9179,7 +9281,7 @@
       </p:sp>
       <p:sp>
         <p:nvSpPr>
-          <p:cNvPr id="28" name="text_345"/>
+          <p:cNvPr id="28" name="text_348"/>
           <p:cNvSpPr txBox="1"/>
           <p:nvPr/>
         </p:nvSpPr>
@@ -9215,7 +9317,7 @@
       </p:sp>
       <p:sp>
         <p:nvSpPr>
-          <p:cNvPr id="29" name="text_346"/>
+          <p:cNvPr id="29" name="text_349"/>
           <p:cNvSpPr txBox="1"/>
           <p:nvPr/>
         </p:nvSpPr>
@@ -9246,7 +9348,7 @@
                 <a:ea typeface="Courier New" pitchFamily="34" charset="-122"/>
                 <a:cs typeface="Courier New" pitchFamily="34" charset="-120"/>
               </a:rPr>
-              <a:t>numerical_gradient · lr 0.5</a:t>
+              <a:t>dW = X.T @ (P − T)/N</a:t>
             </a:r>
             <a:endParaRPr lang="en-US" sz="1150" dirty="0"/>
           </a:p>
@@ -9254,7 +9356,7 @@
       </p:sp>
       <p:sp>
         <p:nvSpPr>
-          <p:cNvPr id="30" name="text_347"/>
+          <p:cNvPr id="30" name="text_350"/>
           <p:cNvSpPr txBox="1"/>
           <p:nvPr/>
         </p:nvSpPr>
@@ -9290,7 +9392,7 @@
       </p:sp>
       <p:sp>
         <p:nvSpPr>
-          <p:cNvPr id="31" name="partRow_348"/>
+          <p:cNvPr id="31" name="partRow_351"/>
           <p:cNvSpPr/>
           <p:nvPr/>
         </p:nvSpPr>
@@ -9317,7 +9419,7 @@
       </p:sp>
       <p:sp>
         <p:nvSpPr>
-          <p:cNvPr id="32" name="text_349"/>
+          <p:cNvPr id="32" name="text_352"/>
           <p:cNvSpPr txBox="1"/>
           <p:nvPr/>
         </p:nvSpPr>
@@ -9353,7 +9455,7 @@
       </p:sp>
       <p:sp>
         <p:nvSpPr>
-          <p:cNvPr id="33" name="text_350"/>
+          <p:cNvPr id="33" name="text_353"/>
           <p:cNvSpPr txBox="1"/>
           <p:nvPr/>
         </p:nvSpPr>
@@ -9392,7 +9494,7 @@
       </p:sp>
       <p:sp>
         <p:nvSpPr>
-          <p:cNvPr id="34" name="text_351"/>
+          <p:cNvPr id="34" name="text_354"/>
           <p:cNvSpPr txBox="1"/>
           <p:nvPr/>
         </p:nvSpPr>
@@ -9428,7 +9530,7 @@
       </p:sp>
       <p:sp>
         <p:nvSpPr>
-          <p:cNvPr id="35" name="text_352"/>
+          <p:cNvPr id="35" name="text_355"/>
           <p:cNvSpPr txBox="1"/>
           <p:nvPr/>
         </p:nvSpPr>
@@ -9464,7 +9566,7 @@
       </p:sp>
       <p:sp>
         <p:nvSpPr>
-          <p:cNvPr id="36" name="text_353"/>
+          <p:cNvPr id="36" name="text_356"/>
           <p:cNvSpPr txBox="1"/>
           <p:nvPr/>
         </p:nvSpPr>
@@ -9506,7 +9608,7 @@
                   <a:schemeClr val="tx1"/>
                 </a:solidFill>
               </a:rPr>
-              <a:t>수치 미분: step 당 손실 6번 × 300 step = 1,800번</a:t>
+              <a:t>W ≈ [3.30, 3.41], b ≈ 0.31 · numerical_gradient 는 dW 검증용</a:t>
             </a:r>
             <a:endParaRPr lang="en-US" sz="1200" dirty="0"/>
           </a:p>
@@ -9720,7 +9822,7 @@
       </p:sp>
       <p:sp>
         <p:nvSpPr>
-          <p:cNvPr id="4" name="panel_354"/>
+          <p:cNvPr id="4" name="panel_357"/>
           <p:cNvSpPr/>
           <p:nvPr/>
         </p:nvSpPr>
@@ -9747,7 +9849,7 @@
       </p:sp>
       <p:sp>
         <p:nvSpPr>
-          <p:cNvPr id="5" name="text_355"/>
+          <p:cNvPr id="5" name="text_358"/>
           <p:cNvSpPr txBox="1"/>
           <p:nvPr/>
         </p:nvSpPr>
@@ -9783,7 +9885,7 @@
       </p:sp>
       <p:sp>
         <p:nvSpPr>
-          <p:cNvPr id="6" name="text_356"/>
+          <p:cNvPr id="6" name="text_359"/>
           <p:cNvSpPr txBox="1"/>
           <p:nvPr/>
         </p:nvSpPr>
@@ -9811,7 +9913,7 @@
                   <a:schemeClr val="tx1"/>
                 </a:solidFill>
               </a:rPr>
-              <a:t>y = step(w · x + b) — 가중치는 방향, 편향은 위치</a:t>
+              <a:t>y = step(xW + b) — 가중치는 방향, 편향은 위치</a:t>
             </a:r>
             <a:endParaRPr lang="en-US" sz="1300" dirty="0"/>
           </a:p>
@@ -9819,7 +9921,7 @@
       </p:sp>
       <p:sp>
         <p:nvSpPr>
-          <p:cNvPr id="7" name="text_357"/>
+          <p:cNvPr id="7" name="text_360"/>
           <p:cNvSpPr txBox="1"/>
           <p:nvPr/>
         </p:nvSpPr>
@@ -9858,7 +9960,7 @@
       </p:sp>
       <p:sp>
         <p:nvSpPr>
-          <p:cNvPr id="8" name="panel_358"/>
+          <p:cNvPr id="8" name="panel_361"/>
           <p:cNvSpPr/>
           <p:nvPr/>
         </p:nvSpPr>
@@ -9885,7 +9987,7 @@
       </p:sp>
       <p:sp>
         <p:nvSpPr>
-          <p:cNvPr id="9" name="text_359"/>
+          <p:cNvPr id="9" name="text_362"/>
           <p:cNvSpPr txBox="1"/>
           <p:nvPr/>
         </p:nvSpPr>
@@ -9921,7 +10023,7 @@
       </p:sp>
       <p:sp>
         <p:nvSpPr>
-          <p:cNvPr id="10" name="text_360"/>
+          <p:cNvPr id="10" name="text_363"/>
           <p:cNvSpPr txBox="1"/>
           <p:nvPr/>
         </p:nvSpPr>
@@ -9949,7 +10051,7 @@
                   <a:schemeClr val="tx1"/>
                 </a:solidFill>
               </a:rPr>
-              <a:t>w ← w + η(t − y)x, XOR 은 직선 하나로 불가능</a:t>
+              <a:t>W ← W − η(y − t)x, XOR 은 직선 하나로 불가능</a:t>
             </a:r>
             <a:endParaRPr lang="en-US" sz="1300" dirty="0"/>
           </a:p>
@@ -9957,7 +10059,7 @@
       </p:sp>
       <p:sp>
         <p:nvSpPr>
-          <p:cNvPr id="11" name="text_361"/>
+          <p:cNvPr id="11" name="text_364"/>
           <p:cNvSpPr txBox="1"/>
           <p:nvPr/>
         </p:nvSpPr>
@@ -9996,7 +10098,7 @@
       </p:sp>
       <p:sp>
         <p:nvSpPr>
-          <p:cNvPr id="12" name="panel_362"/>
+          <p:cNvPr id="12" name="panel_365"/>
           <p:cNvSpPr/>
           <p:nvPr/>
         </p:nvSpPr>
@@ -10023,7 +10125,7 @@
       </p:sp>
       <p:sp>
         <p:nvSpPr>
-          <p:cNvPr id="13" name="text_363"/>
+          <p:cNvPr id="13" name="text_366"/>
           <p:cNvSpPr txBox="1"/>
           <p:nvPr/>
         </p:nvSpPr>
@@ -10059,7 +10161,7 @@
       </p:sp>
       <p:sp>
         <p:nvSpPr>
-          <p:cNvPr id="14" name="text_364"/>
+          <p:cNvPr id="14" name="text_367"/>
           <p:cNvSpPr txBox="1"/>
           <p:nvPr/>
         </p:nvSpPr>
@@ -10095,7 +10197,7 @@
       </p:sp>
       <p:sp>
         <p:nvSpPr>
-          <p:cNvPr id="15" name="text_365"/>
+          <p:cNvPr id="15" name="text_368"/>
           <p:cNvSpPr txBox="1"/>
           <p:nvPr/>
         </p:nvSpPr>
@@ -10134,7 +10236,7 @@
       </p:sp>
       <p:sp>
         <p:nvSpPr>
-          <p:cNvPr id="16" name="panel_366"/>
+          <p:cNvPr id="16" name="panel_369"/>
           <p:cNvSpPr/>
           <p:nvPr/>
         </p:nvSpPr>
@@ -10161,7 +10263,7 @@
       </p:sp>
       <p:sp>
         <p:nvSpPr>
-          <p:cNvPr id="17" name="text_367"/>
+          <p:cNvPr id="17" name="text_370"/>
           <p:cNvSpPr txBox="1"/>
           <p:nvPr/>
         </p:nvSpPr>
@@ -10197,7 +10299,7 @@
       </p:sp>
       <p:sp>
         <p:nvSpPr>
-          <p:cNvPr id="18" name="text_368"/>
+          <p:cNvPr id="18" name="text_371"/>
           <p:cNvSpPr txBox="1"/>
           <p:nvPr/>
         </p:nvSpPr>
@@ -10233,7 +10335,7 @@
       </p:sp>
       <p:sp>
         <p:nvSpPr>
-          <p:cNvPr id="19" name="text_369"/>
+          <p:cNvPr id="19" name="text_372"/>
           <p:cNvSpPr txBox="1"/>
           <p:nvPr/>
         </p:nvSpPr>
@@ -10272,7 +10374,7 @@
       </p:sp>
       <p:sp>
         <p:nvSpPr>
-          <p:cNvPr id="20" name="panel_370"/>
+          <p:cNvPr id="20" name="panel_373"/>
           <p:cNvSpPr/>
           <p:nvPr/>
         </p:nvSpPr>
@@ -10299,7 +10401,7 @@
       </p:sp>
       <p:sp>
         <p:nvSpPr>
-          <p:cNvPr id="21" name="text_371"/>
+          <p:cNvPr id="21" name="text_374"/>
           <p:cNvSpPr txBox="1"/>
           <p:nvPr/>
         </p:nvSpPr>
@@ -10335,7 +10437,7 @@
       </p:sp>
       <p:sp>
         <p:nvSpPr>
-          <p:cNvPr id="22" name="text_372"/>
+          <p:cNvPr id="22" name="text_375"/>
           <p:cNvSpPr txBox="1"/>
           <p:nvPr/>
         </p:nvSpPr>
@@ -10371,7 +10473,7 @@
       </p:sp>
       <p:sp>
         <p:nvSpPr>
-          <p:cNvPr id="23" name="text_373"/>
+          <p:cNvPr id="23" name="text_376"/>
           <p:cNvSpPr txBox="1"/>
           <p:nvPr/>
         </p:nvSpPr>
@@ -10410,7 +10512,7 @@
       </p:sp>
       <p:sp>
         <p:nvSpPr>
-          <p:cNvPr id="24" name="panel_374"/>
+          <p:cNvPr id="24" name="panel_377"/>
           <p:cNvSpPr/>
           <p:nvPr/>
         </p:nvSpPr>
@@ -10437,7 +10539,7 @@
       </p:sp>
       <p:sp>
         <p:nvSpPr>
-          <p:cNvPr id="25" name="text_375"/>
+          <p:cNvPr id="25" name="text_378"/>
           <p:cNvSpPr txBox="1"/>
           <p:nvPr/>
         </p:nvSpPr>
@@ -10473,7 +10575,7 @@
       </p:sp>
       <p:sp>
         <p:nvSpPr>
-          <p:cNvPr id="26" name="text_376"/>
+          <p:cNvPr id="26" name="text_379"/>
           <p:cNvSpPr txBox="1"/>
           <p:nvPr/>
         </p:nvSpPr>
@@ -10509,7 +10611,7 @@
       </p:sp>
       <p:sp>
         <p:nvSpPr>
-          <p:cNvPr id="27" name="text_377"/>
+          <p:cNvPr id="27" name="text_380"/>
           <p:cNvSpPr txBox="1"/>
           <p:nvPr/>
         </p:nvSpPr>
@@ -10548,7 +10650,7 @@
       </p:sp>
       <p:sp>
         <p:nvSpPr>
-          <p:cNvPr id="28" name="panel_378"/>
+          <p:cNvPr id="28" name="panel_381"/>
           <p:cNvSpPr/>
           <p:nvPr/>
         </p:nvSpPr>
@@ -10575,7 +10677,7 @@
       </p:sp>
       <p:sp>
         <p:nvSpPr>
-          <p:cNvPr id="29" name="text_379"/>
+          <p:cNvPr id="29" name="text_382"/>
           <p:cNvSpPr txBox="1"/>
           <p:nvPr/>
         </p:nvSpPr>
@@ -10611,7 +10713,7 @@
       </p:sp>
       <p:sp>
         <p:nvSpPr>
-          <p:cNvPr id="30" name="text_380"/>
+          <p:cNvPr id="30" name="text_383"/>
           <p:cNvSpPr txBox="1"/>
           <p:nvPr/>
         </p:nvSpPr>
@@ -10647,7 +10749,7 @@
       </p:sp>
       <p:sp>
         <p:nvSpPr>
-          <p:cNvPr id="31" name="text_381"/>
+          <p:cNvPr id="31" name="text_384"/>
           <p:cNvSpPr txBox="1"/>
           <p:nvPr/>
         </p:nvSpPr>
@@ -10686,7 +10788,7 @@
       </p:sp>
       <p:sp>
         <p:nvSpPr>
-          <p:cNvPr id="32" name="panel_382"/>
+          <p:cNvPr id="32" name="panel_385"/>
           <p:cNvSpPr/>
           <p:nvPr/>
         </p:nvSpPr>
@@ -10713,7 +10815,7 @@
       </p:sp>
       <p:sp>
         <p:nvSpPr>
-          <p:cNvPr id="33" name="text_383"/>
+          <p:cNvPr id="33" name="text_386"/>
           <p:cNvSpPr txBox="1"/>
           <p:nvPr/>
         </p:nvSpPr>
@@ -10749,7 +10851,7 @@
       </p:sp>
       <p:sp>
         <p:nvSpPr>
-          <p:cNvPr id="34" name="text_384"/>
+          <p:cNvPr id="34" name="text_387"/>
           <p:cNvSpPr txBox="1"/>
           <p:nvPr/>
         </p:nvSpPr>
@@ -10785,7 +10887,7 @@
       </p:sp>
       <p:sp>
         <p:nvSpPr>
-          <p:cNvPr id="35" name="text_385"/>
+          <p:cNvPr id="35" name="text_388"/>
           <p:cNvSpPr txBox="1"/>
           <p:nvPr/>
         </p:nvSpPr>
@@ -10970,7 +11072,7 @@
       </p:sp>
       <p:sp>
         <p:nvSpPr>
-          <p:cNvPr id="4" name="panel_386"/>
+          <p:cNvPr id="4" name="panel_389"/>
           <p:cNvSpPr/>
           <p:nvPr/>
         </p:nvSpPr>
@@ -10997,7 +11099,7 @@
       </p:sp>
       <p:sp>
         <p:nvSpPr>
-          <p:cNvPr id="5" name="text_387"/>
+          <p:cNvPr id="5" name="text_390"/>
           <p:cNvSpPr txBox="1"/>
           <p:nvPr/>
         </p:nvSpPr>
@@ -11033,7 +11135,7 @@
       </p:sp>
       <p:sp>
         <p:nvSpPr>
-          <p:cNvPr id="6" name="text_388"/>
+          <p:cNvPr id="6" name="text_391"/>
           <p:cNvSpPr txBox="1"/>
           <p:nvPr/>
         </p:nvSpPr>
@@ -11069,7 +11171,7 @@
       </p:sp>
       <p:sp>
         <p:nvSpPr>
-          <p:cNvPr id="7" name="codebg_389"/>
+          <p:cNvPr id="7" name="codebg_392"/>
           <p:cNvSpPr/>
           <p:nvPr/>
         </p:nvSpPr>
@@ -11096,7 +11198,7 @@
       </p:sp>
       <p:sp>
         <p:nvSpPr>
-          <p:cNvPr id="8" name="code_390"/>
+          <p:cNvPr id="8" name="code_393"/>
           <p:cNvSpPr txBox="1"/>
           <p:nvPr/>
         </p:nvSpPr>
@@ -11135,7 +11237,7 @@
       </p:sp>
       <p:sp>
         <p:nvSpPr>
-          <p:cNvPr id="9" name="text_391"/>
+          <p:cNvPr id="9" name="text_394"/>
           <p:cNvSpPr txBox="1"/>
           <p:nvPr/>
         </p:nvSpPr>
@@ -11171,7 +11273,7 @@
       </p:sp>
       <p:sp>
         <p:nvSpPr>
-          <p:cNvPr id="10" name="text_392"/>
+          <p:cNvPr id="10" name="text_395"/>
           <p:cNvSpPr txBox="1"/>
           <p:nvPr/>
         </p:nvSpPr>
@@ -11207,7 +11309,7 @@
       </p:sp>
       <p:sp>
         <p:nvSpPr>
-          <p:cNvPr id="11" name="codebg_393"/>
+          <p:cNvPr id="11" name="codebg_396"/>
           <p:cNvSpPr/>
           <p:nvPr/>
         </p:nvSpPr>
@@ -11234,7 +11336,7 @@
       </p:sp>
       <p:sp>
         <p:nvSpPr>
-          <p:cNvPr id="12" name="code_394"/>
+          <p:cNvPr id="12" name="code_397"/>
           <p:cNvSpPr txBox="1"/>
           <p:nvPr/>
         </p:nvSpPr>
@@ -11273,7 +11375,7 @@
       </p:sp>
       <p:sp>
         <p:nvSpPr>
-          <p:cNvPr id="13" name="text_395"/>
+          <p:cNvPr id="13" name="text_398"/>
           <p:cNvSpPr txBox="1"/>
           <p:nvPr/>
         </p:nvSpPr>
@@ -11309,7 +11411,7 @@
       </p:sp>
       <p:sp>
         <p:nvSpPr>
-          <p:cNvPr id="14" name="text_396"/>
+          <p:cNvPr id="14" name="text_399"/>
           <p:cNvSpPr txBox="1"/>
           <p:nvPr/>
         </p:nvSpPr>
@@ -11345,7 +11447,7 @@
       </p:sp>
       <p:sp>
         <p:nvSpPr>
-          <p:cNvPr id="15" name="codebg_397"/>
+          <p:cNvPr id="15" name="codebg_400"/>
           <p:cNvSpPr/>
           <p:nvPr/>
         </p:nvSpPr>
@@ -11372,7 +11474,7 @@
       </p:sp>
       <p:sp>
         <p:nvSpPr>
-          <p:cNvPr id="16" name="code_398"/>
+          <p:cNvPr id="16" name="code_401"/>
           <p:cNvSpPr txBox="1"/>
           <p:nvPr/>
         </p:nvSpPr>
@@ -11411,7 +11513,7 @@
       </p:sp>
       <p:sp>
         <p:nvSpPr>
-          <p:cNvPr id="17" name="text_399"/>
+          <p:cNvPr id="17" name="text_402"/>
           <p:cNvSpPr txBox="1"/>
           <p:nvPr/>
         </p:nvSpPr>
@@ -11447,7 +11549,7 @@
       </p:sp>
       <p:sp>
         <p:nvSpPr>
-          <p:cNvPr id="18" name="text_400"/>
+          <p:cNvPr id="18" name="text_403"/>
           <p:cNvSpPr txBox="1"/>
           <p:nvPr/>
         </p:nvSpPr>
@@ -11483,7 +11585,7 @@
       </p:sp>
       <p:sp>
         <p:nvSpPr>
-          <p:cNvPr id="19" name="codebg_401"/>
+          <p:cNvPr id="19" name="codebg_404"/>
           <p:cNvSpPr/>
           <p:nvPr/>
         </p:nvSpPr>
@@ -11510,7 +11612,7 @@
       </p:sp>
       <p:sp>
         <p:nvSpPr>
-          <p:cNvPr id="20" name="code_402"/>
+          <p:cNvPr id="20" name="code_405"/>
           <p:cNvSpPr txBox="1"/>
           <p:nvPr/>
         </p:nvSpPr>
@@ -11549,7 +11651,7 @@
       </p:sp>
       <p:sp>
         <p:nvSpPr>
-          <p:cNvPr id="21" name="text_403"/>
+          <p:cNvPr id="21" name="text_406"/>
           <p:cNvSpPr txBox="1"/>
           <p:nvPr/>
         </p:nvSpPr>
@@ -11585,7 +11687,7 @@
       </p:sp>
       <p:sp>
         <p:nvSpPr>
-          <p:cNvPr id="22" name="text_404"/>
+          <p:cNvPr id="22" name="text_407"/>
           <p:cNvSpPr txBox="1"/>
           <p:nvPr/>
         </p:nvSpPr>
@@ -11621,7 +11723,7 @@
       </p:sp>
       <p:sp>
         <p:nvSpPr>
-          <p:cNvPr id="23" name="codebg_405"/>
+          <p:cNvPr id="23" name="codebg_408"/>
           <p:cNvSpPr/>
           <p:nvPr/>
         </p:nvSpPr>
@@ -11648,7 +11750,7 @@
       </p:sp>
       <p:sp>
         <p:nvSpPr>
-          <p:cNvPr id="24" name="code_406"/>
+          <p:cNvPr id="24" name="code_409"/>
           <p:cNvSpPr txBox="1"/>
           <p:nvPr/>
         </p:nvSpPr>
@@ -11687,7 +11789,7 @@
       </p:sp>
       <p:sp>
         <p:nvSpPr>
-          <p:cNvPr id="25" name="text_407"/>
+          <p:cNvPr id="25" name="text_410"/>
           <p:cNvSpPr txBox="1"/>
           <p:nvPr/>
         </p:nvSpPr>
@@ -11723,7 +11825,7 @@
       </p:sp>
       <p:sp>
         <p:nvSpPr>
-          <p:cNvPr id="26" name="text_408"/>
+          <p:cNvPr id="26" name="text_411"/>
           <p:cNvSpPr txBox="1"/>
           <p:nvPr/>
         </p:nvSpPr>
@@ -11759,7 +11861,7 @@
       </p:sp>
       <p:sp>
         <p:nvSpPr>
-          <p:cNvPr id="27" name="text_409"/>
+          <p:cNvPr id="27" name="text_412"/>
           <p:cNvSpPr txBox="1"/>
           <p:nvPr/>
         </p:nvSpPr>
@@ -11795,7 +11897,7 @@
       </p:sp>
       <p:sp>
         <p:nvSpPr>
-          <p:cNvPr id="28" name="text_410"/>
+          <p:cNvPr id="28" name="text_413"/>
           <p:cNvSpPr txBox="1"/>
           <p:nvPr/>
         </p:nvSpPr>
@@ -12289,7 +12391,7 @@
                   <a:schemeClr val="tx1"/>
                 </a:solidFill>
               </a:rPr>
-              <a:t>w ← w + η(t − y)x 로 학습시키고, XOR 이 직선 하나로 안 되는 이유를 설명한다</a:t>
+              <a:t>W ← W − η(y − t)x 로 학습시키고, XOR 이 직선 하나로 안 되는 이유를 설명한다</a:t>
             </a:r>
             <a:endParaRPr lang="en-US" sz="1250" dirty="0"/>
           </a:p>
@@ -17692,7 +17794,7 @@
                 <a:ea typeface="Courier New" pitchFamily="34" charset="-122"/>
                 <a:cs typeface="Courier New" pitchFamily="34" charset="-120"/>
               </a:rPr>
-              <a:t>θ ← θ − η∇L</a:t>
+              <a:t>W ← W − η·dW</a:t>
             </a:r>
             <a:endParaRPr lang="en-US" sz="1300" dirty="0"/>
           </a:p>
@@ -18108,7 +18210,7 @@
                   <a:schemeClr val="tx1"/>
                 </a:solidFill>
               </a:rPr>
-              <a:t>y = step(w · x + b): 가중합 + 계단 함수</a:t>
+              <a:t>y = step(xW + b): 가중합 + 계단 함수</a:t>
             </a:r>
             <a:endParaRPr lang="en-US" sz="1300" dirty="0"/>
           </a:p>
@@ -18699,7 +18801,7 @@
                 <a:ea typeface="Courier New" pitchFamily="34" charset="-122"/>
                 <a:cs typeface="Courier New" pitchFamily="34" charset="-120"/>
               </a:rPr>
-              <a:t>s = np.dot(x, w) + b</a:t>
+              <a:t>s = x @ W + b</a:t>
             </a:r>
             <a:endParaRPr lang="en-US" sz="1300" dirty="0"/>
           </a:p>
@@ -18818,7 +18920,7 @@
                 <a:ea typeface="Courier New" pitchFamily="34" charset="-122"/>
                 <a:cs typeface="Courier New" pitchFamily="34" charset="-120"/>
               </a:rPr>
-              <a:t>w = (0.5, 0.5),  b = -0.7</a:t>
+              <a:t>W = (0.5, 0.5),  b = -0.7</a:t>
             </a:r>
             <a:endParaRPr lang="en-US" sz="1300" dirty="0"/>
           </a:p>
@@ -18920,7 +19022,7 @@
                 <a:ea typeface="Courier New" pitchFamily="34" charset="-122"/>
                 <a:cs typeface="Courier New" pitchFamily="34" charset="-120"/>
               </a:rPr>
-              <a:t>NAND: w = (-0.5, -0.5), b = 0.7</a:t>
+              <a:t>NAND: W = (-0.5, -0.5), b = 0.7</a:t>
             </a:r>
             <a:endParaRPr lang="en-US" sz="1300" dirty="0"/>
           </a:p>
@@ -18937,7 +19039,7 @@
                 <a:ea typeface="Courier New" pitchFamily="34" charset="-122"/>
                 <a:cs typeface="Courier New" pitchFamily="34" charset="-120"/>
               </a:rPr>
-              <a:t>OR  : w = ( 0.5,  0.5), b = -0.2</a:t>
+              <a:t>OR  : W = ( 0.5,  0.5), b = -0.2</a:t>
             </a:r>
             <a:endParaRPr lang="en-US" sz="1300" dirty="0"/>
           </a:p>
@@ -19039,7 +19141,7 @@
                 <a:ea typeface="Courier New" pitchFamily="34" charset="-122"/>
                 <a:cs typeface="Courier New" pitchFamily="34" charset="-120"/>
               </a:rPr>
-              <a:t>w1·x1 + w2·x2 + b = 0   # 직선</a:t>
+              <a:t>x1·W1 + x2·W2 + b = 0   # 직선</a:t>
             </a:r>
             <a:endParaRPr lang="en-US" sz="1300" dirty="0"/>
           </a:p>
@@ -19516,7 +19618,7 @@
                   <a:schemeClr val="tx1"/>
                 </a:solidFill>
               </a:rPr>
-              <a:t>결정 경계 x2 = −(w1·x1 + b) / w2</a:t>
+              <a:t>결정 경계 x2 = −(W1·x1 + b) / W2</a:t>
             </a:r>
             <a:endParaRPr lang="en-US" sz="1300" dirty="0"/>
           </a:p>
@@ -20089,7 +20191,7 @@
                 <a:ea typeface="Courier New" pitchFamily="34" charset="-122"/>
                 <a:cs typeface="Courier New" pitchFamily="34" charset="-120"/>
               </a:rPr>
-              <a:t>w = w + lr * (t - y) * x</a:t>
+              <a:t>W = W - lr * (y - t) * x</a:t>
             </a:r>
             <a:endParaRPr lang="en-US" sz="1300" dirty="0"/>
           </a:p>
@@ -20106,7 +20208,7 @@
                 <a:ea typeface="Courier New" pitchFamily="34" charset="-122"/>
                 <a:cs typeface="Courier New" pitchFamily="34" charset="-120"/>
               </a:rPr>
-              <a:t>b = b + lr * (t - y)</a:t>
+              <a:t>b = b - lr * (y - t)</a:t>
             </a:r>
             <a:endParaRPr lang="en-US" sz="1300" dirty="0"/>
           </a:p>
@@ -20225,7 +20327,7 @@
                 <a:ea typeface="Courier New" pitchFamily="34" charset="-122"/>
                 <a:cs typeface="Courier New" pitchFamily="34" charset="-120"/>
               </a:rPr>
-              <a:t>w = (0.2, 0.1), b = -0.2</a:t>
+              <a:t>W = (0.2, 0.1), b = -0.2</a:t>
             </a:r>
             <a:endParaRPr lang="en-US" sz="1300" dirty="0"/>
           </a:p>
